--- a/examples/ppt/shapes/shapes-basic.pptx
+++ b/examples/ppt/shapes/shapes-basic.pptx
@@ -5,11 +5,11 @@
     <p:sldMasterId xmlns:r="http://schemas.openxmlformats.org/officeDocument/2006/relationships" id="2147483648" r:id="rId1"/>
   </p:sldMasterIdLst>
   <p:sldIdLst>
-    <p:sldId id="256" r:id="R820c9b67fe4b4a10"/>
-    <p:sldId id="257" r:id="R9ff92231d2ac4e95"/>
-    <p:sldId id="258" r:id="Rb3ff6a8071604ee1"/>
-    <p:sldId id="259" r:id="Rc9b9ab2361a24aa4"/>
-    <p:sldId id="260" r:id="R473fa8e52a3648d8"/>
+    <p:sldId id="256" r:id="R83572e8137584b56"/>
+    <p:sldId id="257" r:id="Rf1e16d74012940ec"/>
+    <p:sldId id="258" r:id="R02eef72cae2547de"/>
+    <p:sldId id="259" r:id="R42ff2af1e79847a0"/>
+    <p:sldId id="260" r:id="R8601c5a3f4e6436e"/>
   </p:sldIdLst>
   <p:sldSz cx="12192000" cy="6858000"/>
   <p:notesSz cx="6858000" cy="9144000"/>
@@ -318,8 +318,8 @@
       <p:grpSpPr/>
       <p:sp>
         <p:nvSpPr>
-          <p:cNvPr id="10000" name="TextBox 1"/>
-          <p:cNvSpPr/>
+          <p:cNvPr id="100000" name="TextBox 1"/>
+          <p:cNvSpPr txBox="1"/>
           <p:nvPr/>
         </p:nvSpPr>
         <p:spPr>
@@ -344,7 +344,7 @@
       </p:sp>
       <p:sp>
         <p:nvSpPr>
-          <p:cNvPr id="10001" name="TextBox 2"/>
+          <p:cNvPr id="100001" name="TextBox 2"/>
           <p:cNvSpPr/>
           <p:nvPr/>
         </p:nvSpPr>
@@ -377,7 +377,7 @@
       </p:sp>
       <p:sp>
         <p:nvSpPr>
-          <p:cNvPr id="10002" name="TextBox 3"/>
+          <p:cNvPr id="100002" name="TextBox 3"/>
           <p:cNvSpPr/>
           <p:nvPr/>
         </p:nvSpPr>
@@ -410,7 +410,7 @@
       </p:sp>
       <p:sp>
         <p:nvSpPr>
-          <p:cNvPr id="10003" name="TextBox 4"/>
+          <p:cNvPr id="100003" name="TextBox 4"/>
           <p:cNvSpPr/>
           <p:nvPr/>
         </p:nvSpPr>
@@ -443,7 +443,7 @@
       </p:sp>
       <p:sp>
         <p:nvSpPr>
-          <p:cNvPr id="10004" name="TextBox 5"/>
+          <p:cNvPr id="100004" name="TextBox 5"/>
           <p:cNvSpPr/>
           <p:nvPr/>
         </p:nvSpPr>
@@ -476,7 +476,7 @@
       </p:sp>
       <p:sp>
         <p:nvSpPr>
-          <p:cNvPr id="10005" name="TextBox 6"/>
+          <p:cNvPr id="100005" name="TextBox 6"/>
           <p:cNvSpPr/>
           <p:nvPr/>
         </p:nvSpPr>
@@ -509,7 +509,7 @@
       </p:sp>
       <p:sp>
         <p:nvSpPr>
-          <p:cNvPr id="10006" name="TextBox 7"/>
+          <p:cNvPr id="100006" name="TextBox 7"/>
           <p:cNvSpPr/>
           <p:nvPr/>
         </p:nvSpPr>
@@ -542,7 +542,7 @@
       </p:sp>
       <p:sp>
         <p:nvSpPr>
-          <p:cNvPr id="10007" name="TextBox 8"/>
+          <p:cNvPr id="100007" name="TextBox 8"/>
           <p:cNvSpPr/>
           <p:nvPr/>
         </p:nvSpPr>
@@ -575,7 +575,7 @@
       </p:sp>
       <p:sp>
         <p:nvSpPr>
-          <p:cNvPr id="10008" name="TextBox 9"/>
+          <p:cNvPr id="100008" name="TextBox 9"/>
           <p:cNvSpPr/>
           <p:nvPr/>
         </p:nvSpPr>
@@ -623,8 +623,8 @@
       <p:grpSpPr/>
       <p:sp>
         <p:nvSpPr>
-          <p:cNvPr id="10009" name="TextBox 1"/>
-          <p:cNvSpPr/>
+          <p:cNvPr id="100009" name="TextBox 1"/>
+          <p:cNvSpPr txBox="1"/>
           <p:nvPr/>
         </p:nvSpPr>
         <p:spPr>
@@ -649,7 +649,7 @@
       </p:sp>
       <p:sp>
         <p:nvSpPr>
-          <p:cNvPr id="10010" name="TextBox 2"/>
+          <p:cNvPr id="100010" name="TextBox 2"/>
           <p:cNvSpPr/>
           <p:nvPr/>
         </p:nvSpPr>
@@ -682,7 +682,7 @@
       </p:sp>
       <p:sp>
         <p:nvSpPr>
-          <p:cNvPr id="10011" name="TextBox 3"/>
+          <p:cNvPr id="100011" name="TextBox 3"/>
           <p:cNvSpPr/>
           <p:nvPr/>
         </p:nvSpPr>
@@ -715,7 +715,7 @@
       </p:sp>
       <p:sp>
         <p:nvSpPr>
-          <p:cNvPr id="10012" name="TextBox 4"/>
+          <p:cNvPr id="100012" name="TextBox 4"/>
           <p:cNvSpPr/>
           <p:nvPr/>
         </p:nvSpPr>
@@ -756,7 +756,7 @@
       </p:sp>
       <p:sp>
         <p:nvSpPr>
-          <p:cNvPr id="10013" name="TextBox 5"/>
+          <p:cNvPr id="100013" name="TextBox 5"/>
           <p:cNvSpPr/>
           <p:nvPr/>
         </p:nvSpPr>
@@ -799,7 +799,7 @@
       </p:sp>
       <p:sp>
         <p:nvSpPr>
-          <p:cNvPr id="10014" name="TextBox 6"/>
+          <p:cNvPr id="100014" name="TextBox 6"/>
           <p:cNvSpPr/>
           <p:nvPr/>
         </p:nvSpPr>
@@ -837,7 +837,7 @@
       </p:sp>
       <p:sp>
         <p:nvSpPr>
-          <p:cNvPr id="10015" name="TextBox 7"/>
+          <p:cNvPr id="100015" name="TextBox 7"/>
           <p:cNvSpPr/>
           <p:nvPr/>
         </p:nvSpPr>
@@ -872,7 +872,7 @@
       </p:sp>
       <p:sp>
         <p:nvSpPr>
-          <p:cNvPr id="10016" name="TextBox 8"/>
+          <p:cNvPr id="100016" name="TextBox 8"/>
           <p:cNvSpPr/>
           <p:nvPr/>
         </p:nvSpPr>
@@ -909,7 +909,7 @@
       </p:sp>
       <p:sp>
         <p:nvSpPr>
-          <p:cNvPr id="10017" name="TextBox 9"/>
+          <p:cNvPr id="100017" name="TextBox 9"/>
           <p:cNvSpPr/>
           <p:nvPr/>
         </p:nvSpPr>
@@ -968,8 +968,8 @@
       <p:grpSpPr/>
       <p:sp>
         <p:nvSpPr>
-          <p:cNvPr id="10018" name="TextBox 1"/>
-          <p:cNvSpPr/>
+          <p:cNvPr id="100018" name="TextBox 1"/>
+          <p:cNvSpPr txBox="1"/>
           <p:nvPr/>
         </p:nvSpPr>
         <p:spPr>
@@ -994,7 +994,7 @@
       </p:sp>
       <p:sp>
         <p:nvSpPr>
-          <p:cNvPr id="10019" name="TextBox 2"/>
+          <p:cNvPr id="100019" name="TextBox 2"/>
           <p:cNvSpPr/>
           <p:nvPr/>
         </p:nvSpPr>
@@ -1027,7 +1027,7 @@
       </p:sp>
       <p:sp>
         <p:nvSpPr>
-          <p:cNvPr id="10020" name="TextBox 3"/>
+          <p:cNvPr id="100020" name="TextBox 3"/>
           <p:cNvSpPr/>
           <p:nvPr/>
         </p:nvSpPr>
@@ -1060,7 +1060,7 @@
       </p:sp>
       <p:sp>
         <p:nvSpPr>
-          <p:cNvPr id="10021" name="TextBox 4"/>
+          <p:cNvPr id="100021" name="TextBox 4"/>
           <p:cNvSpPr/>
           <p:nvPr/>
         </p:nvSpPr>
@@ -1093,7 +1093,7 @@
       </p:sp>
       <p:sp>
         <p:nvSpPr>
-          <p:cNvPr id="10022" name="TextBox 5"/>
+          <p:cNvPr id="100022" name="TextBox 5"/>
           <p:cNvSpPr/>
           <p:nvPr/>
         </p:nvSpPr>
@@ -1128,7 +1128,7 @@
       </p:sp>
       <p:sp>
         <p:nvSpPr>
-          <p:cNvPr id="10023" name="TextBox 6"/>
+          <p:cNvPr id="100023" name="TextBox 6"/>
           <p:cNvSpPr/>
           <p:nvPr/>
         </p:nvSpPr>
@@ -1162,7 +1162,7 @@
       </p:sp>
       <p:sp>
         <p:nvSpPr>
-          <p:cNvPr id="10024" name="TextBox 7"/>
+          <p:cNvPr id="100024" name="TextBox 7"/>
           <p:cNvSpPr/>
           <p:nvPr/>
         </p:nvSpPr>
@@ -1196,8 +1196,8 @@
       </p:sp>
       <p:sp>
         <p:nvSpPr>
-          <p:cNvPr id="10025" name="TextBox 8"/>
-          <p:cNvSpPr/>
+          <p:cNvPr id="100025" name="TextBox 8"/>
+          <p:cNvSpPr txBox="1"/>
           <p:nvPr/>
         </p:nvSpPr>
         <p:spPr>
@@ -1222,7 +1222,7 @@
       </p:sp>
       <p:sp>
         <p:nvSpPr>
-          <p:cNvPr id="10026" name="TextBox 9"/>
+          <p:cNvPr id="100026" name="TextBox 9"/>
           <p:cNvSpPr/>
           <p:nvPr/>
         </p:nvSpPr>
@@ -1246,17 +1246,12 @@
         <p:txBody>
           <a:bodyPr xmlns:a="http://schemas.openxmlformats.org/drawingml/2006/main"/>
           <a:lstStyle xmlns:a="http://schemas.openxmlformats.org/drawingml/2006/main"/>
-          <a:p xmlns:a="http://schemas.openxmlformats.org/drawingml/2006/main">
-            <a:r>
-              <a:rPr lang="en-US"/>
-              <a:t/>
-            </a:r>
-          </a:p>
-        </p:txBody>
-      </p:sp>
-      <p:sp>
-        <p:nvSpPr>
-          <p:cNvPr id="10027" name="TextBox 10"/>
+          <a:p xmlns:a="http://schemas.openxmlformats.org/drawingml/2006/main"/>
+        </p:txBody>
+      </p:sp>
+      <p:sp>
+        <p:nvSpPr>
+          <p:cNvPr id="100027" name="TextBox 10"/>
           <p:cNvSpPr/>
           <p:nvPr/>
         </p:nvSpPr>
@@ -1280,12 +1275,7 @@
         <p:txBody>
           <a:bodyPr xmlns:a="http://schemas.openxmlformats.org/drawingml/2006/main"/>
           <a:lstStyle xmlns:a="http://schemas.openxmlformats.org/drawingml/2006/main"/>
-          <a:p xmlns:a="http://schemas.openxmlformats.org/drawingml/2006/main">
-            <a:r>
-              <a:rPr lang="en-US"/>
-              <a:t/>
-            </a:r>
-          </a:p>
+          <a:p xmlns:a="http://schemas.openxmlformats.org/drawingml/2006/main"/>
         </p:txBody>
       </p:sp>
     </p:spTree>
@@ -1305,8 +1295,8 @@
       <p:grpSpPr/>
       <p:sp>
         <p:nvSpPr>
-          <p:cNvPr id="10028" name="TextBox 1"/>
-          <p:cNvSpPr/>
+          <p:cNvPr id="100028" name="TextBox 1"/>
+          <p:cNvSpPr txBox="1"/>
           <p:nvPr/>
         </p:nvSpPr>
         <p:spPr>
@@ -1331,7 +1321,7 @@
       </p:sp>
       <p:sp>
         <p:nvSpPr>
-          <p:cNvPr id="10029" name="TextBox 2"/>
+          <p:cNvPr id="100029" name="TextBox 2"/>
           <p:cNvSpPr/>
           <p:nvPr/>
         </p:nvSpPr>
@@ -1364,7 +1354,7 @@
       </p:sp>
       <p:sp>
         <p:nvSpPr>
-          <p:cNvPr id="10030" name="TextBox 3"/>
+          <p:cNvPr id="100030" name="TextBox 3"/>
           <p:cNvSpPr/>
           <p:nvPr/>
         </p:nvSpPr>
@@ -1397,7 +1387,7 @@
       </p:sp>
       <p:sp>
         <p:nvSpPr>
-          <p:cNvPr id="10031" name="TextBox 4"/>
+          <p:cNvPr id="100031" name="TextBox 4"/>
           <p:cNvSpPr/>
           <p:nvPr/>
         </p:nvSpPr>
@@ -1430,7 +1420,7 @@
       </p:sp>
       <p:sp>
         <p:nvSpPr>
-          <p:cNvPr id="10032" name="TextBox 5"/>
+          <p:cNvPr id="100032" name="TextBox 5"/>
           <p:cNvSpPr/>
           <p:nvPr/>
         </p:nvSpPr>
@@ -1463,7 +1453,7 @@
       </p:sp>
       <p:sp>
         <p:nvSpPr>
-          <p:cNvPr id="10033" name="TextBox 6"/>
+          <p:cNvPr id="100033" name="TextBox 6"/>
           <p:cNvSpPr/>
           <p:nvPr/>
         </p:nvSpPr>
@@ -1496,7 +1486,7 @@
       </p:sp>
       <p:sp>
         <p:nvSpPr>
-          <p:cNvPr id="10034" name="TextBox 7"/>
+          <p:cNvPr id="100034" name="TextBox 7"/>
           <p:cNvSpPr/>
           <p:nvPr/>
         </p:nvSpPr>
@@ -1529,7 +1519,7 @@
       </p:sp>
       <p:sp>
         <p:nvSpPr>
-          <p:cNvPr id="10035" name="TextBox 8"/>
+          <p:cNvPr id="100035" name="TextBox 8"/>
           <p:cNvSpPr/>
           <p:nvPr/>
         </p:nvSpPr>
@@ -1562,7 +1552,7 @@
       </p:sp>
       <p:sp>
         <p:nvSpPr>
-          <p:cNvPr id="10036" name="TextBox 9"/>
+          <p:cNvPr id="100036" name="TextBox 9"/>
           <p:cNvSpPr/>
           <p:nvPr/>
         </p:nvSpPr>
@@ -1595,7 +1585,7 @@
       </p:sp>
       <p:sp>
         <p:nvSpPr>
-          <p:cNvPr id="10037" name="TextBox 10"/>
+          <p:cNvPr id="100037" name="TextBox 10"/>
           <p:cNvSpPr/>
           <p:nvPr/>
         </p:nvSpPr>
@@ -1635,7 +1625,7 @@
       </p:sp>
       <p:sp>
         <p:nvSpPr>
-          <p:cNvPr id="10038" name="TextBox 11"/>
+          <p:cNvPr id="100038" name="TextBox 11"/>
           <p:cNvSpPr/>
           <p:nvPr/>
         </p:nvSpPr>
@@ -1675,7 +1665,7 @@
       </p:sp>
       <p:sp>
         <p:nvSpPr>
-          <p:cNvPr id="10039" name="TextBox 12"/>
+          <p:cNvPr id="100039" name="TextBox 12"/>
           <p:cNvSpPr/>
           <p:nvPr/>
         </p:nvSpPr>
@@ -1726,8 +1716,8 @@
       <p:grpSpPr/>
       <p:sp>
         <p:nvSpPr>
-          <p:cNvPr id="10040" name="TextBox 1"/>
-          <p:cNvSpPr/>
+          <p:cNvPr id="100040" name="TextBox 1"/>
+          <p:cNvSpPr txBox="1"/>
           <p:nvPr/>
         </p:nvSpPr>
         <p:spPr>
@@ -1752,7 +1742,7 @@
       </p:sp>
       <p:sp>
         <p:nvSpPr>
-          <p:cNvPr id="10041" name="TextBox 2"/>
+          <p:cNvPr id="100041" name="TextBox 2"/>
           <p:cNvSpPr/>
           <p:nvPr/>
         </p:nvSpPr>
@@ -1775,18 +1765,13 @@
         <p:txBody>
           <a:bodyPr xmlns:a="http://schemas.openxmlformats.org/drawingml/2006/main"/>
           <a:lstStyle xmlns:a="http://schemas.openxmlformats.org/drawingml/2006/main"/>
-          <a:p xmlns:a="http://schemas.openxmlformats.org/drawingml/2006/main">
-            <a:r>
-              <a:rPr lang="en-US"/>
-              <a:t/>
-            </a:r>
-          </a:p>
-        </p:txBody>
-      </p:sp>
-      <p:sp>
-        <p:nvSpPr>
-          <p:cNvPr id="10042" name="TextBox 3"/>
-          <p:cNvSpPr/>
+          <a:p xmlns:a="http://schemas.openxmlformats.org/drawingml/2006/main"/>
+        </p:txBody>
+      </p:sp>
+      <p:sp>
+        <p:nvSpPr>
+          <p:cNvPr id="100042" name="TextBox 3"/>
+          <p:cNvSpPr txBox="1"/>
           <p:nvPr/>
         </p:nvSpPr>
         <p:spPr>
@@ -1818,7 +1803,7 @@
       </p:sp>
       <p:sp>
         <p:nvSpPr>
-          <p:cNvPr id="10043" name="TextBox 4"/>
+          <p:cNvPr id="100043" name="TextBox 4"/>
           <p:cNvSpPr/>
           <p:nvPr/>
         </p:nvSpPr>
@@ -1841,18 +1826,13 @@
         <p:txBody>
           <a:bodyPr xmlns:a="http://schemas.openxmlformats.org/drawingml/2006/main"/>
           <a:lstStyle xmlns:a="http://schemas.openxmlformats.org/drawingml/2006/main"/>
-          <a:p xmlns:a="http://schemas.openxmlformats.org/drawingml/2006/main">
-            <a:r>
-              <a:rPr lang="en-US"/>
-              <a:t/>
-            </a:r>
-          </a:p>
-        </p:txBody>
-      </p:sp>
-      <p:sp>
-        <p:nvSpPr>
-          <p:cNvPr id="10044" name="TextBox 5"/>
-          <p:cNvSpPr/>
+          <a:p xmlns:a="http://schemas.openxmlformats.org/drawingml/2006/main"/>
+        </p:txBody>
+      </p:sp>
+      <p:sp>
+        <p:nvSpPr>
+          <p:cNvPr id="100044" name="TextBox 5"/>
+          <p:cNvSpPr txBox="1"/>
           <p:nvPr/>
         </p:nvSpPr>
         <p:spPr>
@@ -1884,7 +1864,7 @@
       </p:sp>
       <p:sp>
         <p:nvSpPr>
-          <p:cNvPr id="10045" name="TextBox 6"/>
+          <p:cNvPr id="100045" name="TextBox 6"/>
           <p:cNvSpPr/>
           <p:nvPr/>
         </p:nvSpPr>
@@ -1907,18 +1887,13 @@
         <p:txBody>
           <a:bodyPr xmlns:a="http://schemas.openxmlformats.org/drawingml/2006/main"/>
           <a:lstStyle xmlns:a="http://schemas.openxmlformats.org/drawingml/2006/main"/>
-          <a:p xmlns:a="http://schemas.openxmlformats.org/drawingml/2006/main">
-            <a:r>
-              <a:rPr lang="en-US"/>
-              <a:t/>
-            </a:r>
-          </a:p>
-        </p:txBody>
-      </p:sp>
-      <p:sp>
-        <p:nvSpPr>
-          <p:cNvPr id="10046" name="TextBox 7"/>
-          <p:cNvSpPr/>
+          <a:p xmlns:a="http://schemas.openxmlformats.org/drawingml/2006/main"/>
+        </p:txBody>
+      </p:sp>
+      <p:sp>
+        <p:nvSpPr>
+          <p:cNvPr id="100046" name="TextBox 7"/>
+          <p:cNvSpPr txBox="1"/>
           <p:nvPr/>
         </p:nvSpPr>
         <p:spPr>
@@ -1950,7 +1925,7 @@
       </p:sp>
       <p:sp>
         <p:nvSpPr>
-          <p:cNvPr id="10047" name="TextBox 8"/>
+          <p:cNvPr id="100047" name="TextBox 8"/>
           <p:cNvSpPr/>
           <p:nvPr/>
         </p:nvSpPr>
@@ -1975,18 +1950,13 @@
         <p:txBody>
           <a:bodyPr xmlns:a="http://schemas.openxmlformats.org/drawingml/2006/main"/>
           <a:lstStyle xmlns:a="http://schemas.openxmlformats.org/drawingml/2006/main"/>
-          <a:p xmlns:a="http://schemas.openxmlformats.org/drawingml/2006/main">
-            <a:r>
-              <a:rPr lang="en-US"/>
-              <a:t/>
-            </a:r>
-          </a:p>
-        </p:txBody>
-      </p:sp>
-      <p:sp>
-        <p:nvSpPr>
-          <p:cNvPr id="10048" name="TextBox 9"/>
-          <p:cNvSpPr/>
+          <a:p xmlns:a="http://schemas.openxmlformats.org/drawingml/2006/main"/>
+        </p:txBody>
+      </p:sp>
+      <p:sp>
+        <p:nvSpPr>
+          <p:cNvPr id="100048" name="TextBox 9"/>
+          <p:cNvSpPr txBox="1"/>
           <p:nvPr/>
         </p:nvSpPr>
         <p:spPr>
@@ -2018,7 +1988,7 @@
       </p:sp>
       <p:sp>
         <p:nvSpPr>
-          <p:cNvPr id="10049" name="TextBox 10"/>
+          <p:cNvPr id="100049" name="TextBox 10"/>
           <p:cNvSpPr/>
           <p:nvPr/>
         </p:nvSpPr>
@@ -2043,18 +2013,13 @@
         <p:txBody>
           <a:bodyPr xmlns:a="http://schemas.openxmlformats.org/drawingml/2006/main"/>
           <a:lstStyle xmlns:a="http://schemas.openxmlformats.org/drawingml/2006/main"/>
-          <a:p xmlns:a="http://schemas.openxmlformats.org/drawingml/2006/main">
-            <a:r>
-              <a:rPr lang="en-US"/>
-              <a:t/>
-            </a:r>
-          </a:p>
-        </p:txBody>
-      </p:sp>
-      <p:sp>
-        <p:nvSpPr>
-          <p:cNvPr id="10050" name="TextBox 11"/>
-          <p:cNvSpPr/>
+          <a:p xmlns:a="http://schemas.openxmlformats.org/drawingml/2006/main"/>
+        </p:txBody>
+      </p:sp>
+      <p:sp>
+        <p:nvSpPr>
+          <p:cNvPr id="100050" name="TextBox 11"/>
+          <p:cNvSpPr txBox="1"/>
           <p:nvPr/>
         </p:nvSpPr>
         <p:spPr>
@@ -2086,7 +2051,7 @@
       </p:sp>
       <p:sp>
         <p:nvSpPr>
-          <p:cNvPr id="10051" name="TextBox 12"/>
+          <p:cNvPr id="100051" name="TextBox 12"/>
           <p:cNvSpPr/>
           <p:nvPr/>
         </p:nvSpPr>
@@ -2111,18 +2076,13 @@
         <p:txBody>
           <a:bodyPr xmlns:a="http://schemas.openxmlformats.org/drawingml/2006/main"/>
           <a:lstStyle xmlns:a="http://schemas.openxmlformats.org/drawingml/2006/main"/>
-          <a:p xmlns:a="http://schemas.openxmlformats.org/drawingml/2006/main">
-            <a:r>
-              <a:rPr lang="en-US"/>
-              <a:t/>
-            </a:r>
-          </a:p>
-        </p:txBody>
-      </p:sp>
-      <p:sp>
-        <p:nvSpPr>
-          <p:cNvPr id="10052" name="TextBox 13"/>
-          <p:cNvSpPr/>
+          <a:p xmlns:a="http://schemas.openxmlformats.org/drawingml/2006/main"/>
+        </p:txBody>
+      </p:sp>
+      <p:sp>
+        <p:nvSpPr>
+          <p:cNvPr id="100052" name="TextBox 13"/>
+          <p:cNvSpPr txBox="1"/>
           <p:nvPr/>
         </p:nvSpPr>
         <p:spPr>
@@ -2154,7 +2114,70 @@
       </p:sp>
       <p:sp>
         <p:nvSpPr>
-          <p:cNvPr id="10053" name="TextBox 14"/>
+          <p:cNvPr id="100053" name="TextBox 14"/>
+          <p:cNvSpPr/>
+          <p:nvPr/>
+        </p:nvSpPr>
+        <p:spPr>
+          <a:xfrm xmlns:a="http://schemas.openxmlformats.org/drawingml/2006/main">
+            <a:off x="457200" y="5029200"/>
+            <a:ext cx="2286000" cy="1645920"/>
+          </a:xfrm>
+          <a:prstGeom xmlns:a="http://schemas.openxmlformats.org/drawingml/2006/main" prst="triangle">
+            <a:avLst/>
+          </a:prstGeom>
+          <a:solidFill xmlns:a="http://schemas.openxmlformats.org/drawingml/2006/main">
+            <a:srgbClr val="A8DADC"/>
+          </a:solidFill>
+          <a:ln xmlns:a="http://schemas.openxmlformats.org/drawingml/2006/main" w="101600">
+            <a:solidFill>
+              <a:srgbClr val="E63946"/>
+            </a:solidFill>
+            <a:miter lim="800000"/>
+          </a:ln>
+        </p:spPr>
+        <p:txBody>
+          <a:bodyPr xmlns:a="http://schemas.openxmlformats.org/drawingml/2006/main"/>
+          <a:lstStyle xmlns:a="http://schemas.openxmlformats.org/drawingml/2006/main"/>
+          <a:p xmlns:a="http://schemas.openxmlformats.org/drawingml/2006/main"/>
+        </p:txBody>
+      </p:sp>
+      <p:sp>
+        <p:nvSpPr>
+          <p:cNvPr id="100054" name="TextBox 15"/>
+          <p:cNvSpPr txBox="1"/>
+          <p:nvPr/>
+        </p:nvSpPr>
+        <p:spPr>
+          <a:xfrm xmlns:a="http://schemas.openxmlformats.org/drawingml/2006/main">
+            <a:off x="457200" y="6766560"/>
+            <a:ext cx="3657600" cy="457200"/>
+          </a:xfrm>
+          <a:prstGeom xmlns:a="http://schemas.openxmlformats.org/drawingml/2006/main" prst="rect">
+            <a:avLst/>
+          </a:prstGeom>
+          <a:noFill xmlns:a="http://schemas.openxmlformats.org/drawingml/2006/main"/>
+          <a:ln xmlns:a="http://schemas.openxmlformats.org/drawingml/2006/main" w="0">
+            <a:solidFill>
+              <a:srgbClr val="000000"/>
+            </a:solidFill>
+            <a:prstDash val="solid"/>
+          </a:ln>
+        </p:spPr>
+        <p:txBody>
+          <a:bodyPr xmlns:a="http://schemas.openxmlformats.org/drawingml/2006/main"/>
+          <a:lstStyle xmlns:a="http://schemas.openxmlformats.org/drawingml/2006/main"/>
+          <a:p xmlns:a="http://schemas.openxmlformats.org/drawingml/2006/main">
+            <a:r>
+              <a:rPr lang="en-US" sz="1200"/>
+              <a:t>lineJoin="miter:800000"  (limit 800%)</a:t>
+            </a:r>
+          </a:p>
+        </p:txBody>
+      </p:sp>
+      <p:sp>
+        <p:nvSpPr>
+          <p:cNvPr id="100055" name="TextBox 16"/>
           <p:cNvSpPr/>
           <p:nvPr/>
         </p:nvSpPr>
@@ -2178,18 +2201,13 @@
         <p:txBody>
           <a:bodyPr xmlns:a="http://schemas.openxmlformats.org/drawingml/2006/main"/>
           <a:lstStyle xmlns:a="http://schemas.openxmlformats.org/drawingml/2006/main"/>
-          <a:p xmlns:a="http://schemas.openxmlformats.org/drawingml/2006/main">
-            <a:r>
-              <a:rPr lang="en-US"/>
-              <a:t/>
-            </a:r>
-          </a:p>
-        </p:txBody>
-      </p:sp>
-      <p:sp>
-        <p:nvSpPr>
-          <p:cNvPr id="10054" name="TextBox 15"/>
-          <p:cNvSpPr/>
+          <a:p xmlns:a="http://schemas.openxmlformats.org/drawingml/2006/main"/>
+        </p:txBody>
+      </p:sp>
+      <p:sp>
+        <p:nvSpPr>
+          <p:cNvPr id="100056" name="TextBox 17"/>
+          <p:cNvSpPr txBox="1"/>
           <p:nvPr/>
         </p:nvSpPr>
         <p:spPr>
@@ -2221,7 +2239,7 @@
       </p:sp>
       <p:sp>
         <p:nvSpPr>
-          <p:cNvPr id="10055" name="TextBox 16"/>
+          <p:cNvPr id="100057" name="TextBox 18"/>
           <p:cNvSpPr/>
           <p:nvPr/>
         </p:nvSpPr>
@@ -2245,18 +2263,13 @@
         <p:txBody>
           <a:bodyPr xmlns:a="http://schemas.openxmlformats.org/drawingml/2006/main"/>
           <a:lstStyle xmlns:a="http://schemas.openxmlformats.org/drawingml/2006/main"/>
-          <a:p xmlns:a="http://schemas.openxmlformats.org/drawingml/2006/main">
-            <a:r>
-              <a:rPr lang="en-US"/>
-              <a:t/>
-            </a:r>
-          </a:p>
-        </p:txBody>
-      </p:sp>
-      <p:sp>
-        <p:nvSpPr>
-          <p:cNvPr id="10056" name="TextBox 17"/>
-          <p:cNvSpPr/>
+          <a:p xmlns:a="http://schemas.openxmlformats.org/drawingml/2006/main"/>
+        </p:txBody>
+      </p:sp>
+      <p:sp>
+        <p:nvSpPr>
+          <p:cNvPr id="100058" name="TextBox 19"/>
+          <p:cNvSpPr txBox="1"/>
           <p:nvPr/>
         </p:nvSpPr>
         <p:spPr>

--- a/examples/ppt/shapes/shapes-basic.pptx
+++ b/examples/ppt/shapes/shapes-basic.pptx
@@ -5,11 +5,11 @@
     <p:sldMasterId xmlns:r="http://schemas.openxmlformats.org/officeDocument/2006/relationships" id="2147483648" r:id="rId1"/>
   </p:sldMasterIdLst>
   <p:sldIdLst>
-    <p:sldId id="256" r:id="R83572e8137584b56"/>
-    <p:sldId id="257" r:id="Rf1e16d74012940ec"/>
-    <p:sldId id="258" r:id="R02eef72cae2547de"/>
-    <p:sldId id="259" r:id="R42ff2af1e79847a0"/>
-    <p:sldId id="260" r:id="R8601c5a3f4e6436e"/>
+    <p:sldId id="256" r:id="R2702cb63f00d40cb"/>
+    <p:sldId id="257" r:id="Ra4d0b27b2fa14c0c"/>
+    <p:sldId id="258" r:id="R51d6cb7693794227"/>
+    <p:sldId id="259" r:id="Rd2965e7c73234724"/>
+    <p:sldId id="260" r:id="Rc8326d659a584e0d"/>
   </p:sldIdLst>
   <p:sldSz cx="12192000" cy="6858000"/>
   <p:notesSz cx="6858000" cy="9144000"/>
@@ -2120,8 +2120,8 @@
         </p:nvSpPr>
         <p:spPr>
           <a:xfrm xmlns:a="http://schemas.openxmlformats.org/drawingml/2006/main">
-            <a:off x="457200" y="5029200"/>
-            <a:ext cx="2286000" cy="1645920"/>
+            <a:off x="457200" y="4663440"/>
+            <a:ext cx="2286000" cy="1463040"/>
           </a:xfrm>
           <a:prstGeom xmlns:a="http://schemas.openxmlformats.org/drawingml/2006/main" prst="triangle">
             <a:avLst/>
@@ -2150,8 +2150,8 @@
         </p:nvSpPr>
         <p:spPr>
           <a:xfrm xmlns:a="http://schemas.openxmlformats.org/drawingml/2006/main">
-            <a:off x="457200" y="6766560"/>
-            <a:ext cx="3657600" cy="457200"/>
+            <a:off x="457200" y="6309360"/>
+            <a:ext cx="3657600" cy="365760"/>
           </a:xfrm>
           <a:prstGeom xmlns:a="http://schemas.openxmlformats.org/drawingml/2006/main" prst="rect">
             <a:avLst/>
@@ -2183,8 +2183,8 @@
         </p:nvSpPr>
         <p:spPr>
           <a:xfrm xmlns:a="http://schemas.openxmlformats.org/drawingml/2006/main">
-            <a:off x="8229600" y="2560320"/>
-            <a:ext cx="1828800" cy="1828800"/>
+            <a:off x="8138160" y="2560320"/>
+            <a:ext cx="1737360" cy="1828800"/>
           </a:xfrm>
           <a:prstGeom xmlns:a="http://schemas.openxmlformats.org/drawingml/2006/main" prst="rect">
             <a:avLst/>
@@ -2212,8 +2212,8 @@
         </p:nvSpPr>
         <p:spPr>
           <a:xfrm xmlns:a="http://schemas.openxmlformats.org/drawingml/2006/main">
-            <a:off x="8229600" y="4480560"/>
-            <a:ext cx="2286000" cy="365760"/>
+            <a:off x="8138160" y="4480560"/>
+            <a:ext cx="1828800" cy="365760"/>
           </a:xfrm>
           <a:prstGeom xmlns:a="http://schemas.openxmlformats.org/drawingml/2006/main" prst="rect">
             <a:avLst/>
@@ -2245,8 +2245,8 @@
         </p:nvSpPr>
         <p:spPr>
           <a:xfrm xmlns:a="http://schemas.openxmlformats.org/drawingml/2006/main">
-            <a:off x="10515600" y="2560320"/>
-            <a:ext cx="1828800" cy="1828800"/>
+            <a:off x="10058400" y="2560320"/>
+            <a:ext cx="1737360" cy="1828800"/>
           </a:xfrm>
           <a:prstGeom xmlns:a="http://schemas.openxmlformats.org/drawingml/2006/main" prst="rect">
             <a:avLst/>
@@ -2274,8 +2274,8 @@
         </p:nvSpPr>
         <p:spPr>
           <a:xfrm xmlns:a="http://schemas.openxmlformats.org/drawingml/2006/main">
-            <a:off x="10515600" y="4480560"/>
-            <a:ext cx="2286000" cy="365760"/>
+            <a:off x="10058400" y="4480560"/>
+            <a:ext cx="1828800" cy="365760"/>
           </a:xfrm>
           <a:prstGeom xmlns:a="http://schemas.openxmlformats.org/drawingml/2006/main" prst="rect">
             <a:avLst/>
